--- a/Topic_A/Exam_Practice/AT-A-L10_Writing_Workshop_Reading_and_Listening_Exam_Skills.pptx
+++ b/Topic_A/Exam_Practice/AT-A-L10_Writing_Workshop_Reading_and_Listening_Exam_Skills.pptx
@@ -784,7 +784,11 @@
           <a:lstStyle/>
           <a:p>
             <a:r>
-              <a:rPr lang="en-US" dirty="0"/>
+              <a:rPr lang="ar-SA" dirty="0">
+                <a:latin typeface="Amiri" pitchFamily="2" charset="-78"/>
+                <a:ea typeface="Amiri" pitchFamily="2" charset="-78"/>
+                <a:cs typeface="Amiri" pitchFamily="2" charset="-78"/>
+              </a:rPr>
               <a:t>Q3 (3 min to choose and read). Title (أ) suits Core and Develop; title (ب) suits Stretch.</a:t>
             </a:r>
             <a:endParaRPr lang="en-US" dirty="0"/>
@@ -1403,7 +1407,11 @@
           <a:lstStyle/>
           <a:p>
             <a:r>
-              <a:rPr lang="en-US" dirty="0"/>
+              <a:rPr lang="ar-SA" dirty="0">
+                <a:latin typeface="Amiri" pitchFamily="2" charset="-78"/>
+                <a:ea typeface="Amiri" pitchFamily="2" charset="-78"/>
+                <a:cs typeface="Amiri" pitchFamily="2" charset="-78"/>
+              </a:rPr>
               <a:t>WELCOME (1 min) — while students join.
 • Greet each student by name as they arrive: السَّلَامُ عَلَيْكُمْ. Take the register (Pastoral Tracker: attendance 0/1).
 • 2-MINUTE CHECK-IN (SEND training): a private chat to any student who seemed unsettled last lesson — “Are you okay today? 👍 / 👎”.
@@ -1936,7 +1944,11 @@
           <a:lstStyle/>
           <a:p>
             <a:r>
-              <a:rPr lang="en-US" dirty="0"/>
+              <a:rPr lang="ar-SA" dirty="0">
+                <a:latin typeface="Amiri" pitchFamily="2" charset="-78"/>
+                <a:ea typeface="Amiri" pitchFamily="2" charset="-78"/>
+                <a:cs typeface="Amiri" pitchFamily="2" charset="-78"/>
+              </a:rPr>
               <a:t>Question words: أَيْنَ (where) · مَتَى (when) · كَيْفَ (how) · مَاذَا (what) · مَا رَأْيُكَ (your opinion) — ادْعُ = invite (an instruction).</a:t>
             </a:r>
             <a:endParaRPr lang="en-US" dirty="0"/>
@@ -2508,6 +2520,7 @@
                   <a:srgbClr val="D4AF37"/>
                 </a:solidFill>
                 <a:latin typeface="Amiri" pitchFamily="2" charset="-78"/>
+                <a:ea typeface="Amiri" pitchFamily="2" charset="-78"/>
                 <a:cs typeface="Amiri" pitchFamily="2" charset="-78"/>
               </a:rPr>
               <a:t>م</a:t>
@@ -2714,6 +2727,7 @@
                   <a:srgbClr val="D4AF37"/>
                 </a:solidFill>
                 <a:latin typeface="Amiri" pitchFamily="2" charset="-78"/>
+                <a:ea typeface="Amiri" pitchFamily="2" charset="-78"/>
                 <a:cs typeface="Amiri" pitchFamily="2" charset="-78"/>
               </a:rPr>
               <a:t>وَرْشَةُ الكِتَابَةِ — يَوْمٌ فِي الخَارِجِ</a:t>
@@ -3171,6 +3185,7 @@
                   <a:srgbClr val="D4AF37"/>
                 </a:solidFill>
                 <a:latin typeface="Amiri" pitchFamily="2" charset="-78"/>
+                <a:ea typeface="Amiri" pitchFamily="2" charset="-78"/>
                 <a:cs typeface="Amiri" pitchFamily="2" charset="-78"/>
               </a:rPr>
               <a:t>م</a:t>
@@ -3491,6 +3506,7 @@
                   <a:srgbClr val="8A6D1E"/>
                 </a:solidFill>
                 <a:latin typeface="Amiri" pitchFamily="2" charset="-78"/>
+                <a:ea typeface="Amiri" pitchFamily="2" charset="-78"/>
                 <a:cs typeface="Amiri" pitchFamily="2" charset="-78"/>
               </a:rPr>
               <a:t>نَمُوذَجُ الإِجَابَةِ</a:t>
@@ -3604,6 +3620,7 @@
                   <a:srgbClr val="1F2A37"/>
                 </a:solidFill>
                 <a:latin typeface="Amiri" pitchFamily="2" charset="-78"/>
+                <a:ea typeface="Amiri" pitchFamily="2" charset="-78"/>
                 <a:cs typeface="Amiri" pitchFamily="2" charset="-78"/>
               </a:rPr>
               <a:t>مَرْحَبًا يَا رَامِي،</a:t>
@@ -3623,6 +3640,7 @@
                   <a:srgbClr val="1F2A37"/>
                 </a:solidFill>
                 <a:latin typeface="Amiri" pitchFamily="2" charset="-78"/>
+                <a:ea typeface="Amiri" pitchFamily="2" charset="-78"/>
                 <a:cs typeface="Amiri" pitchFamily="2" charset="-78"/>
               </a:rPr>
               <a:t>كَيْفَ حَالُكَ؟ أَمْسِ ذَهَبْتُ مَعَ أُسْرَتِي إِلَى الشَّاطِئِ. خَرَجْنَا مِنَ البَيْتِ فِي السَّاعَةِ الثَّامِنَةِ، وَذَهَبْنَا بِالسَّيَّارَةِ، وَاسْتَغْرَقَتِ الرِّحْلَةُ سَاعَةً. سَبَحْنَا فِي البَحْرِ، وَلَعِبْنَا كُرَةَ القَدَمِ عَلَى الرَّمْلِ. فِي الظُّهْرِ أَكَلْنَا السَّمَكَ وَالسَّلَطَةَ فِي مَطْعَمٍ صَغِيرٍ. كَانَ اليَوْمُ مُمْتِعًا جِدًّا، لٰكِنِّي كُنْتُ مُتْعَبًا فِي المَسَاءِ. فِي الشَّهْرِ القَادِمِ سَنَذْهَبُ إِلَى الجَبَلِ. هَلْ تَأْتِي مَعَنَا؟</a:t>
@@ -3642,6 +3660,7 @@
                   <a:srgbClr val="1F2A37"/>
                 </a:solidFill>
                 <a:latin typeface="Amiri" pitchFamily="2" charset="-78"/>
+                <a:ea typeface="Amiri" pitchFamily="2" charset="-78"/>
                 <a:cs typeface="Amiri" pitchFamily="2" charset="-78"/>
               </a:rPr>
               <a:t>مَعَ السَّلَامَةِ،</a:t>
@@ -3661,6 +3680,7 @@
                   <a:srgbClr val="1F2A37"/>
                 </a:solidFill>
                 <a:latin typeface="Amiri" pitchFamily="2" charset="-78"/>
+                <a:ea typeface="Amiri" pitchFamily="2" charset="-78"/>
                 <a:cs typeface="Amiri" pitchFamily="2" charset="-78"/>
               </a:rPr>
               <a:t>عَادِلٌ</a:t>
@@ -3824,11 +3844,12 @@
               <a:buNone/>
             </a:pPr>
             <a:r>
-              <a:rPr lang="en-US" sz="950" b="1" dirty="0">
+              <a:rPr lang="ar-SA" sz="950" b="1" dirty="0">
                 <a:solidFill>
                   <a:srgbClr val="FFFFFF"/>
                 </a:solidFill>
                 <a:latin typeface="Calibri" pitchFamily="34" charset="0"/>
+                <a:ea typeface="Amiri" pitchFamily="2" charset="-78"/>
                 <a:cs typeface="Amiri" pitchFamily="2" charset="-78"/>
               </a:rPr>
               <a:t>خَرَجْنَا</a:t>
@@ -3889,11 +3910,12 @@
               <a:buNone/>
             </a:pPr>
             <a:r>
-              <a:rPr lang="en-US" sz="950" b="1" dirty="0">
+              <a:rPr lang="ar-SA" sz="950" b="1" dirty="0">
                 <a:solidFill>
                   <a:srgbClr val="FFFFFF"/>
                 </a:solidFill>
                 <a:latin typeface="Calibri" pitchFamily="34" charset="0"/>
+                <a:ea typeface="Amiri" pitchFamily="2" charset="-78"/>
                 <a:cs typeface="Amiri" pitchFamily="2" charset="-78"/>
               </a:rPr>
               <a:t>بِالسَّيَّارَةِ</a:t>
@@ -3954,11 +3976,12 @@
               <a:buNone/>
             </a:pPr>
             <a:r>
-              <a:rPr lang="en-US" sz="950" b="1" dirty="0">
+              <a:rPr lang="ar-SA" sz="950" b="1" dirty="0">
                 <a:solidFill>
                   <a:srgbClr val="FFFFFF"/>
                 </a:solidFill>
                 <a:latin typeface="Calibri" pitchFamily="34" charset="0"/>
+                <a:ea typeface="Amiri" pitchFamily="2" charset="-78"/>
                 <a:cs typeface="Amiri" pitchFamily="2" charset="-78"/>
               </a:rPr>
               <a:t>كَانَ اليَوْمُ مُمْتِعًا</a:t>
@@ -4019,11 +4042,12 @@
               <a:buNone/>
             </a:pPr>
             <a:r>
-              <a:rPr lang="en-US" sz="950" b="1" dirty="0">
+              <a:rPr lang="ar-SA" sz="950" b="1" dirty="0">
                 <a:solidFill>
                   <a:srgbClr val="FFFFFF"/>
                 </a:solidFill>
                 <a:latin typeface="Calibri" pitchFamily="34" charset="0"/>
+                <a:ea typeface="Amiri" pitchFamily="2" charset="-78"/>
                 <a:cs typeface="Amiri" pitchFamily="2" charset="-78"/>
               </a:rPr>
               <a:t>سَنَذْهَبُ</a:t>
@@ -4157,6 +4181,7 @@
                   <a:srgbClr val="D4AF37"/>
                 </a:solidFill>
                 <a:latin typeface="Amiri" pitchFamily="2" charset="-78"/>
+                <a:ea typeface="Amiri" pitchFamily="2" charset="-78"/>
                 <a:cs typeface="Amiri" pitchFamily="2" charset="-78"/>
               </a:rPr>
               <a:t>م</a:t>
@@ -4477,6 +4502,7 @@
                   <a:srgbClr val="8A6D1E"/>
                 </a:solidFill>
                 <a:latin typeface="Amiri" pitchFamily="2" charset="-78"/>
+                <a:ea typeface="Amiri" pitchFamily="2" charset="-78"/>
                 <a:cs typeface="Amiri" pitchFamily="2" charset="-78"/>
               </a:rPr>
               <a:t>نَمُوذَجُ الإِجَابَةِ</a:t>
@@ -4590,6 +4616,7 @@
                   <a:srgbClr val="1F2A37"/>
                 </a:solidFill>
                 <a:latin typeface="Amiri" pitchFamily="2" charset="-78"/>
+                <a:ea typeface="Amiri" pitchFamily="2" charset="-78"/>
                 <a:cs typeface="Amiri" pitchFamily="2" charset="-78"/>
               </a:rPr>
               <a:t>عَزِيزِي رَامِي،</a:t>
@@ -4609,6 +4636,7 @@
                   <a:srgbClr val="1F2A37"/>
                 </a:solidFill>
                 <a:latin typeface="Amiri" pitchFamily="2" charset="-78"/>
+                <a:ea typeface="Amiri" pitchFamily="2" charset="-78"/>
                 <a:cs typeface="Amiri" pitchFamily="2" charset="-78"/>
               </a:rPr>
               <a:t>تَحِيَّةً طَيِّبَةً، وَبَعْدُ، فَأُرِيدُ أَنْ أُخْبِرَكَ عَنْ نُزْهَتِنَا أَمْسِ إِلَى الشَّاطِئِ. خَرَجْنَا مُبَكِّرًا فِي السَّابِعَةِ لِكَيْ نَتَجَنَّبَ الازْدِحَامَ، وَاسْتَغْرَقَتِ الرِّحْلَةُ بِالسَّيَّارَةِ سَاعَةً تَقْرِيبًا، فَوَصَلْنَا قَبْلَ أَنْ يَمْتَلِئَ الشَّاطِئُ بِالنَّاسِ. قَضَيْنَا الصَّبَاحَ فِي السِّبَاحَةِ وَبِنَاءِ القِلَاعِ الرَّمْلِيَّةِ مَعَ أَخِي الصَّغِيرِ، ثُمَّ تَغَدَّيْنَا سَمَكًا مَشْوِيًّا فِي مَطْعَمٍ يُطِلُّ عَلَى البَحْرِ، وَكَانَ أَلَذَّ سَمَكٍ أَكَلْتُهُ. صَحِيحٌ أَنَّ الشَّمْسَ كَانَتْ حَارَّةً جِدًّا، غَيْرَ أَنَّنَا اسْتَعْمَلْنَا الكْرِيمَ وَشَرِبْنَا مَاءً كَثِيرًا، فَلَمْ يُصَبْ أَحَدٌ بِضَرْبَةِ شَمْسٍ. فِي الشَّهْرِ القَادِمِ سَنَزُورُ الجَبَلَ، فَمَا رَأْيُكَ أَنْ تَأْتِيَ مَعَنَا؟</a:t>
@@ -4628,6 +4656,7 @@
                   <a:srgbClr val="1F2A37"/>
                 </a:solidFill>
                 <a:latin typeface="Amiri" pitchFamily="2" charset="-78"/>
+                <a:ea typeface="Amiri" pitchFamily="2" charset="-78"/>
                 <a:cs typeface="Amiri" pitchFamily="2" charset="-78"/>
               </a:rPr>
               <a:t>مَعَ تَحِيَّاتِي،</a:t>
@@ -4647,6 +4676,7 @@
                   <a:srgbClr val="1F2A37"/>
                 </a:solidFill>
                 <a:latin typeface="Amiri" pitchFamily="2" charset="-78"/>
+                <a:ea typeface="Amiri" pitchFamily="2" charset="-78"/>
                 <a:cs typeface="Amiri" pitchFamily="2" charset="-78"/>
               </a:rPr>
               <a:t>عَادِلٌ</a:t>
@@ -4810,11 +4840,12 @@
               <a:buNone/>
             </a:pPr>
             <a:r>
-              <a:rPr lang="en-US" sz="950" b="1" dirty="0">
+              <a:rPr lang="ar-SA" sz="950" b="1" dirty="0">
                 <a:solidFill>
                   <a:srgbClr val="FFFFFF"/>
                 </a:solidFill>
                 <a:latin typeface="Calibri" pitchFamily="34" charset="0"/>
+                <a:ea typeface="Amiri" pitchFamily="2" charset="-78"/>
                 <a:cs typeface="Amiri" pitchFamily="2" charset="-78"/>
               </a:rPr>
               <a:t>لِكَيْ نَتَجَنَّبَ</a:t>
@@ -4875,11 +4906,12 @@
               <a:buNone/>
             </a:pPr>
             <a:r>
-              <a:rPr lang="en-US" sz="950" b="1" dirty="0">
+              <a:rPr lang="ar-SA" sz="950" b="1" dirty="0">
                 <a:solidFill>
                   <a:srgbClr val="FFFFFF"/>
                 </a:solidFill>
                 <a:latin typeface="Calibri" pitchFamily="34" charset="0"/>
+                <a:ea typeface="Amiri" pitchFamily="2" charset="-78"/>
                 <a:cs typeface="Amiri" pitchFamily="2" charset="-78"/>
               </a:rPr>
               <a:t>قَضَيْنَا الصَّبَاحَ فِي</a:t>
@@ -4940,11 +4972,12 @@
               <a:buNone/>
             </a:pPr>
             <a:r>
-              <a:rPr lang="en-US" sz="950" b="1" dirty="0">
+              <a:rPr lang="ar-SA" sz="950" b="1" dirty="0">
                 <a:solidFill>
                   <a:srgbClr val="FFFFFF"/>
                 </a:solidFill>
                 <a:latin typeface="Calibri" pitchFamily="34" charset="0"/>
+                <a:ea typeface="Amiri" pitchFamily="2" charset="-78"/>
                 <a:cs typeface="Amiri" pitchFamily="2" charset="-78"/>
               </a:rPr>
               <a:t>أَلَذَّ سَمَكٍ أَكَلْتُهُ</a:t>
@@ -5005,11 +5038,12 @@
               <a:buNone/>
             </a:pPr>
             <a:r>
-              <a:rPr lang="en-US" sz="950" b="1" dirty="0">
+              <a:rPr lang="ar-SA" sz="950" b="1" dirty="0">
                 <a:solidFill>
                   <a:srgbClr val="FFFFFF"/>
                 </a:solidFill>
                 <a:latin typeface="Calibri" pitchFamily="34" charset="0"/>
+                <a:ea typeface="Amiri" pitchFamily="2" charset="-78"/>
                 <a:cs typeface="Amiri" pitchFamily="2" charset="-78"/>
               </a:rPr>
               <a:t>مَا رَأْيُكَ أَنْ تَأْتِيَ</a:t>
@@ -5143,6 +5177,7 @@
                   <a:srgbClr val="D4AF37"/>
                 </a:solidFill>
                 <a:latin typeface="Amiri" pitchFamily="2" charset="-78"/>
+                <a:ea typeface="Amiri" pitchFamily="2" charset="-78"/>
                 <a:cs typeface="Amiri" pitchFamily="2" charset="-78"/>
               </a:rPr>
               <a:t>م</a:t>
@@ -5463,6 +5498,7 @@
                   <a:srgbClr val="8A6D1E"/>
                 </a:solidFill>
                 <a:latin typeface="Amiri" pitchFamily="2" charset="-78"/>
+                <a:ea typeface="Amiri" pitchFamily="2" charset="-78"/>
                 <a:cs typeface="Amiri" pitchFamily="2" charset="-78"/>
               </a:rPr>
               <a:t>اخْتَرْ عُنْوَانًا وَاحِدًا</a:t>
@@ -5743,6 +5779,7 @@
                   <a:srgbClr val="1B3B6F"/>
                 </a:solidFill>
                 <a:latin typeface="Amiri" pitchFamily="2" charset="-78"/>
+                <a:ea typeface="Amiri" pitchFamily="2" charset="-78"/>
                 <a:cs typeface="Amiri" pitchFamily="2" charset="-78"/>
               </a:rPr>
               <a:t>يَوْمٌ لَا أَنْسَاهُ</a:t>
@@ -5781,6 +5818,7 @@
                   <a:srgbClr val="1B3B6F"/>
                 </a:solidFill>
                 <a:latin typeface="Amiri" pitchFamily="2" charset="-78"/>
+                <a:ea typeface="Amiri" pitchFamily="2" charset="-78"/>
                 <a:cs typeface="Amiri" pitchFamily="2" charset="-78"/>
               </a:rPr>
               <a:t>(أ)</a:t>
@@ -5884,6 +5922,7 @@
                   <a:srgbClr val="1B3B6F"/>
                 </a:solidFill>
                 <a:latin typeface="Amiri" pitchFamily="2" charset="-78"/>
+                <a:ea typeface="Amiri" pitchFamily="2" charset="-78"/>
                 <a:cs typeface="Amiri" pitchFamily="2" charset="-78"/>
               </a:rPr>
               <a:t>أَيْنَ ذَهَبْتَ؟ وَكَيْفَ؟ · مَاذَا فَعَلْتُمْ وَأَكَلْتُمْ؟ · مَاذَا حَدَثَ؟ · رَأْيُكَ وَخُطَطُكَ</a:t>
@@ -6015,6 +6054,7 @@
                   <a:srgbClr val="1B3B6F"/>
                 </a:solidFill>
                 <a:latin typeface="Amiri" pitchFamily="2" charset="-78"/>
+                <a:ea typeface="Amiri" pitchFamily="2" charset="-78"/>
                 <a:cs typeface="Amiri" pitchFamily="2" charset="-78"/>
               </a:rPr>
               <a:t>عُطْلَةُ نِهَايَةِ الأُسْبُوعِ: بَيْنَ الأَمْسِ وَاليَوْمِ</a:t>
@@ -6053,6 +6093,7 @@
                   <a:srgbClr val="1B3B6F"/>
                 </a:solidFill>
                 <a:latin typeface="Amiri" pitchFamily="2" charset="-78"/>
+                <a:ea typeface="Amiri" pitchFamily="2" charset="-78"/>
                 <a:cs typeface="Amiri" pitchFamily="2" charset="-78"/>
               </a:rPr>
               <a:t>(ب)</a:t>
@@ -6156,6 +6197,7 @@
                   <a:srgbClr val="1B3B6F"/>
                 </a:solidFill>
                 <a:latin typeface="Amiri" pitchFamily="2" charset="-78"/>
+                <a:ea typeface="Amiri" pitchFamily="2" charset="-78"/>
                 <a:cs typeface="Amiri" pitchFamily="2" charset="-78"/>
               </a:rPr>
               <a:t>كَيْفَ تَغَيَّرَتْ؟ · لِمَاذَا؟ · تَجْرِبَةٌ أَوْ مُبَادَرَةٌ · رَأْيُكَ وَاقْتِرَاحُكَ</a:t>
@@ -6355,6 +6397,7 @@
                   <a:srgbClr val="D4AF37"/>
                 </a:solidFill>
                 <a:latin typeface="Amiri" pitchFamily="2" charset="-78"/>
+                <a:ea typeface="Amiri" pitchFamily="2" charset="-78"/>
                 <a:cs typeface="Amiri" pitchFamily="2" charset="-78"/>
               </a:rPr>
               <a:t>م</a:t>
@@ -6675,6 +6718,7 @@
                   <a:srgbClr val="8A6D1E"/>
                 </a:solidFill>
                 <a:latin typeface="Amiri" pitchFamily="2" charset="-78"/>
+                <a:ea typeface="Amiri" pitchFamily="2" charset="-78"/>
                 <a:cs typeface="Amiri" pitchFamily="2" charset="-78"/>
               </a:rPr>
               <a:t>خُطَّةُ الكِتَابَةِ</a:t>
@@ -7299,6 +7343,7 @@
                   <a:srgbClr val="1B3B6F"/>
                 </a:solidFill>
                 <a:latin typeface="Amiri" pitchFamily="2" charset="-78"/>
+                <a:ea typeface="Amiri" pitchFamily="2" charset="-78"/>
                 <a:cs typeface="Amiri" pitchFamily="2" charset="-78"/>
               </a:rPr>
               <a:t>ذَهَبْنَا إِلَى الجَبَلِ بِالسَّيَّارَةِ.</a:t>
@@ -7398,6 +7443,7 @@
                   <a:srgbClr val="1B3B6F"/>
                 </a:solidFill>
                 <a:latin typeface="Amiri" pitchFamily="2" charset="-78"/>
+                <a:ea typeface="Amiri" pitchFamily="2" charset="-78"/>
                 <a:cs typeface="Amiri" pitchFamily="2" charset="-78"/>
               </a:rPr>
               <a:t>النُّزُهَاتُ مُفِيدَةٌ لِلصِّحَّةِ.</a:t>
@@ -7497,6 +7543,7 @@
                   <a:srgbClr val="1B3B6F"/>
                 </a:solidFill>
                 <a:latin typeface="Amiri" pitchFamily="2" charset="-78"/>
+                <a:ea typeface="Amiri" pitchFamily="2" charset="-78"/>
                 <a:cs typeface="Amiri" pitchFamily="2" charset="-78"/>
               </a:rPr>
               <a:t>سَنُكَرِّرُ التَّجْرِبَةَ كُلَّ شَهْرٍ.</a:t>
@@ -7658,6 +7705,7 @@
                   <a:srgbClr val="1F2A37"/>
                 </a:solidFill>
                 <a:latin typeface="Amiri" pitchFamily="2" charset="-78"/>
+                <a:ea typeface="Amiri" pitchFamily="2" charset="-78"/>
                 <a:cs typeface="Amiri" pitchFamily="2" charset="-78"/>
               </a:rPr>
               <a:t>أ</a:t>
@@ -7684,6 +7732,7 @@
                   <a:srgbClr val="1F2A37"/>
                 </a:solidFill>
                 <a:latin typeface="Amiri" pitchFamily="2" charset="-78"/>
+                <a:ea typeface="Amiri" pitchFamily="2" charset="-78"/>
                 <a:cs typeface="Amiri" pitchFamily="2" charset="-78"/>
               </a:rPr>
               <a:t>ب</a:t>
@@ -7830,6 +7879,7 @@
                   <a:srgbClr val="D4AF37"/>
                 </a:solidFill>
                 <a:latin typeface="Amiri" pitchFamily="2" charset="-78"/>
+                <a:ea typeface="Amiri" pitchFamily="2" charset="-78"/>
                 <a:cs typeface="Amiri" pitchFamily="2" charset="-78"/>
               </a:rPr>
               <a:t>م</a:t>
@@ -8087,6 +8137,7 @@
                   <a:srgbClr val="8A6D1E"/>
                 </a:solidFill>
                 <a:latin typeface="Amiri" pitchFamily="2" charset="-78"/>
+                <a:ea typeface="Amiri" pitchFamily="2" charset="-78"/>
                 <a:cs typeface="Amiri" pitchFamily="2" charset="-78"/>
               </a:rPr>
               <a:t>أ</a:t>
@@ -8151,6 +8202,7 @@
                   <a:srgbClr val="1B3B6F"/>
                 </a:solidFill>
                 <a:latin typeface="Amiri" pitchFamily="2" charset="-78"/>
+                <a:ea typeface="Amiri" pitchFamily="2" charset="-78"/>
                 <a:cs typeface="Amiri" pitchFamily="2" charset="-78"/>
               </a:rPr>
               <a:t>أ</a:t>
@@ -8202,6 +8254,7 @@
                   <a:srgbClr val="8A6D1E"/>
                 </a:solidFill>
                 <a:latin typeface="Amiri" pitchFamily="2" charset="-78"/>
+                <a:ea typeface="Amiri" pitchFamily="2" charset="-78"/>
                 <a:cs typeface="Amiri" pitchFamily="2" charset="-78"/>
               </a:rPr>
               <a:t>نَمُوذَجُ الإِجَابَةِ</a:t>
@@ -8315,6 +8368,7 @@
                   <a:srgbClr val="1F2A37"/>
                 </a:solidFill>
                 <a:latin typeface="Amiri" pitchFamily="2" charset="-78"/>
+                <a:ea typeface="Amiri" pitchFamily="2" charset="-78"/>
                 <a:cs typeface="Amiri" pitchFamily="2" charset="-78"/>
               </a:rPr>
               <a:t>فِي نِهَايَةِ الأُسْبُوعِ المَاضِي ذَهَبْتُ مَعَ صَفِّي إِلَى حَدِيقَةِ الحَيَوَانَاتِ. خَرَجْنَا مِنَ المَدْرَسَةِ فِي السَّاعَةِ التَّاسِعَةِ، وَذَهَبْنَا بِالحَافِلَةِ. كَانَتِ الرِّحْلَةُ طَوِيلَةً، لٰكِنَّنَا غَنَّيْنَا وَضَحِكْنَا فِي الطَّرِيقِ، وَوَصَلْنَا فِي السَّاعَةِ العَاشِرَةِ وَالنِّصْفِ.</a:t>
@@ -8334,6 +8388,7 @@
                   <a:srgbClr val="1F2A37"/>
                 </a:solidFill>
                 <a:latin typeface="Amiri" pitchFamily="2" charset="-78"/>
+                <a:ea typeface="Amiri" pitchFamily="2" charset="-78"/>
                 <a:cs typeface="Amiri" pitchFamily="2" charset="-78"/>
               </a:rPr>
               <a:t>فِي الحَدِيقَةِ رَأَيْنَا الأُسُودَ وَالفِيَلَةَ وَالقُرُودَ. القُرُودُ كَانَتْ مُضْحِكَةً جِدًّا! فِي الظُّهْرِ جَلَسْنَا تَحْتَ الأَشْجَارِ، وَأَكَلْنَا السَّنْدَوِيشَاتِ وَالفَوَاكِهَ، وَشَرِبْنَا المَاءَ، لِأَنَّ الجَوَّ كَانَ حَارًّا.</a:t>
@@ -8353,6 +8408,7 @@
                   <a:srgbClr val="1F2A37"/>
                 </a:solidFill>
                 <a:latin typeface="Amiri" pitchFamily="2" charset="-78"/>
+                <a:ea typeface="Amiri" pitchFamily="2" charset="-78"/>
                 <a:cs typeface="Amiri" pitchFamily="2" charset="-78"/>
               </a:rPr>
               <a:t>بَعْدَ الغَدَاءِ مَشَيْنَا كَثِيرًا، فَتَعِبْنَا. رَجَعْنَا إِلَى المَدْرَسَةِ فِي السَّاعَةِ الرَّابِعَةِ، وَنِمْتُ فِي الحَافِلَةِ! فِي البَيْتِ أَخْبَرْتُ أُمِّي عَنْ كُلِّ شَيْءٍ، وَأَرَيْتُهَا الصُّوَرَ الَّتِي أَخَذْتُهَا بِهَاتِفِي.</a:t>
@@ -8372,6 +8428,7 @@
                   <a:srgbClr val="1F2A37"/>
                 </a:solidFill>
                 <a:latin typeface="Amiri" pitchFamily="2" charset="-78"/>
+                <a:ea typeface="Amiri" pitchFamily="2" charset="-78"/>
                 <a:cs typeface="Amiri" pitchFamily="2" charset="-78"/>
               </a:rPr>
               <a:t>فِي رَأْيِي، النُّزُهَاتُ مُفِيدَةٌ، لِأَنَّنَا نَتَعَلَّمُ أَشْيَاءَ جَدِيدَةً، وَنَمْشِي فِي الهَوَاءِ النَّقِيِّ، وَنَقْضِي وَقْتًا جَمِيلًا مَعَ أَصْدِقَائِنَا. فِي الصَّيْفِ القَادِمِ سَأَزُورُ الحَدِيقَةَ مَرَّةً أُخْرَى مَعَ أُسْرَتِي، لِأَنَّ أَخِي الصَّغِيرَ يُحِبُّ الحَيَوَانَاتِ.</a:t>
@@ -8535,11 +8592,12 @@
               <a:buNone/>
             </a:pPr>
             <a:r>
-              <a:rPr lang="en-US" sz="950" b="1" dirty="0">
+              <a:rPr lang="ar-SA" sz="950" b="1" dirty="0">
                 <a:solidFill>
                   <a:srgbClr val="FFFFFF"/>
                 </a:solidFill>
                 <a:latin typeface="Calibri" pitchFamily="34" charset="0"/>
+                <a:ea typeface="Amiri" pitchFamily="2" charset="-78"/>
                 <a:cs typeface="Amiri" pitchFamily="2" charset="-78"/>
               </a:rPr>
               <a:t>ذَهَبْنَا بِالحَافِلَةِ</a:t>
@@ -8600,11 +8658,12 @@
               <a:buNone/>
             </a:pPr>
             <a:r>
-              <a:rPr lang="en-US" sz="950" b="1" dirty="0">
+              <a:rPr lang="ar-SA" sz="950" b="1" dirty="0">
                 <a:solidFill>
                   <a:srgbClr val="FFFFFF"/>
                 </a:solidFill>
                 <a:latin typeface="Calibri" pitchFamily="34" charset="0"/>
+                <a:ea typeface="Amiri" pitchFamily="2" charset="-78"/>
                 <a:cs typeface="Amiri" pitchFamily="2" charset="-78"/>
               </a:rPr>
               <a:t>لِأَنَّ الجَوَّ كَانَ حَارًّا</a:t>
@@ -8665,11 +8724,12 @@
               <a:buNone/>
             </a:pPr>
             <a:r>
-              <a:rPr lang="en-US" sz="950" b="1" dirty="0">
+              <a:rPr lang="ar-SA" sz="950" b="1" dirty="0">
                 <a:solidFill>
                   <a:srgbClr val="FFFFFF"/>
                 </a:solidFill>
                 <a:latin typeface="Calibri" pitchFamily="34" charset="0"/>
+                <a:ea typeface="Amiri" pitchFamily="2" charset="-78"/>
                 <a:cs typeface="Amiri" pitchFamily="2" charset="-78"/>
               </a:rPr>
               <a:t>فَتَعِبْنَا</a:t>
@@ -8730,11 +8790,12 @@
               <a:buNone/>
             </a:pPr>
             <a:r>
-              <a:rPr lang="en-US" sz="950" b="1" dirty="0">
+              <a:rPr lang="ar-SA" sz="950" b="1" dirty="0">
                 <a:solidFill>
                   <a:srgbClr val="FFFFFF"/>
                 </a:solidFill>
                 <a:latin typeface="Calibri" pitchFamily="34" charset="0"/>
+                <a:ea typeface="Amiri" pitchFamily="2" charset="-78"/>
                 <a:cs typeface="Amiri" pitchFamily="2" charset="-78"/>
               </a:rPr>
               <a:t>سَأَزُورُ</a:t>
@@ -8868,6 +8929,7 @@
                   <a:srgbClr val="D4AF37"/>
                 </a:solidFill>
                 <a:latin typeface="Amiri" pitchFamily="2" charset="-78"/>
+                <a:ea typeface="Amiri" pitchFamily="2" charset="-78"/>
                 <a:cs typeface="Amiri" pitchFamily="2" charset="-78"/>
               </a:rPr>
               <a:t>م</a:t>
@@ -9125,6 +9187,7 @@
                   <a:srgbClr val="8A6D1E"/>
                 </a:solidFill>
                 <a:latin typeface="Amiri" pitchFamily="2" charset="-78"/>
+                <a:ea typeface="Amiri" pitchFamily="2" charset="-78"/>
                 <a:cs typeface="Amiri" pitchFamily="2" charset="-78"/>
               </a:rPr>
               <a:t>أ</a:t>
@@ -9189,6 +9252,7 @@
                   <a:srgbClr val="1B3B6F"/>
                 </a:solidFill>
                 <a:latin typeface="Amiri" pitchFamily="2" charset="-78"/>
+                <a:ea typeface="Amiri" pitchFamily="2" charset="-78"/>
                 <a:cs typeface="Amiri" pitchFamily="2" charset="-78"/>
               </a:rPr>
               <a:t>أ</a:t>
@@ -9240,6 +9304,7 @@
                   <a:srgbClr val="8A6D1E"/>
                 </a:solidFill>
                 <a:latin typeface="Amiri" pitchFamily="2" charset="-78"/>
+                <a:ea typeface="Amiri" pitchFamily="2" charset="-78"/>
                 <a:cs typeface="Amiri" pitchFamily="2" charset="-78"/>
               </a:rPr>
               <a:t>نَمُوذَجُ الإِجَابَةِ</a:t>
@@ -9353,6 +9418,7 @@
                   <a:srgbClr val="1F2A37"/>
                 </a:solidFill>
                 <a:latin typeface="Amiri" pitchFamily="2" charset="-78"/>
+                <a:ea typeface="Amiri" pitchFamily="2" charset="-78"/>
                 <a:cs typeface="Amiri" pitchFamily="2" charset="-78"/>
               </a:rPr>
               <a:t>لَنْ أَنْسَى يَوْمَ الجُمُعَةِ المَاضِي، عِنْدَمَا قَرَّرَتْ أُسْرَتِي أَنْ تَقْضِيَ يَوْمًا كَامِلًا فِي الجَبَلِ بَعِيدًا عَنِ الشَّاشَاتِ. خَرَجْنَا قَبْلَ شُرُوقِ الشَّمْسِ، وَاسْتَغْرَقَتِ الرِّحْلَةُ بِالسَّيَّارَةِ سَاعَتَيْنِ، فَتَنَاوَلْنَا الفُطُورَ عِنْدَ وُصُولِنَا عَلَى صَخْرَةٍ كَبِيرَةٍ تُطِلُّ عَلَى الوَادِي: خُبْزٌ سَاخِنٌ وَزَيْتُونٌ وَجُبْنٌ وَشَايٌ بِالنَّعْنَاعِ.</a:t>
@@ -9372,6 +9438,7 @@
                   <a:srgbClr val="1F2A37"/>
                 </a:solidFill>
                 <a:latin typeface="Amiri" pitchFamily="2" charset="-78"/>
+                <a:ea typeface="Amiri" pitchFamily="2" charset="-78"/>
                 <a:cs typeface="Amiri" pitchFamily="2" charset="-78"/>
               </a:rPr>
               <a:t>بَعْدَ ذٰلِكَ مَشَيْنَا ثَلَاثَ سَاعَاتٍ فِي طَرِيقٍ ضَيِّقٍ، وَكَانَ أَبِي يَشْرَحُ لَنَا أَسْمَاءَ النَّبَاتَاتِ. أَمَّا أُخْتِي الصَّغِيرَةُ فَكَانَتْ تَجْمَعُ الأَزْهَارَ وَتَسْأَلُ عَنْ كُلِّ شَيْءٍ تَرَاهُ، حَتَّى تَعِبَتْ فَحَمَلَهَا أَبِي عَلَى ظَهْرِهِ.</a:t>
@@ -9391,6 +9458,7 @@
                   <a:srgbClr val="1F2A37"/>
                 </a:solidFill>
                 <a:latin typeface="Amiri" pitchFamily="2" charset="-78"/>
+                <a:ea typeface="Amiri" pitchFamily="2" charset="-78"/>
                 <a:cs typeface="Amiri" pitchFamily="2" charset="-78"/>
               </a:rPr>
               <a:t>فَجْأَةً تَغَيَّرَ الجَوُّ، وَبَدَأَ المَطَرُ يَنْزِلُ بِغَزَارَةٍ، فَاخْتَبَأْنَا تَحْتَ شَجَرَةٍ كَبِيرَةٍ، وَشَرِبْنَا الشَّايَ السَّاخِنَ مِنَ التُّرْمُسِ وَنَحْنُ نَضْحَكُ. رَجَعْنَا إِلَى البَيْتِ مُبْتَلِّينَ وَمُتْعَبِينَ، لٰكِنْ سُعَدَاءَ جِدًّا.</a:t>
@@ -9410,6 +9478,7 @@
                   <a:srgbClr val="1F2A37"/>
                 </a:solidFill>
                 <a:latin typeface="Amiri" pitchFamily="2" charset="-78"/>
+                <a:ea typeface="Amiri" pitchFamily="2" charset="-78"/>
                 <a:cs typeface="Amiri" pitchFamily="2" charset="-78"/>
               </a:rPr>
               <a:t>صَحِيحٌ أَنَّ اليَوْمَ كَانَ مُتْعِبًا، غَيْرَ أَنَّهُ كَانَ أَجْمَلَ مِنْ أَيِّ يَوْمٍ قَضَيْتُهُ أَمَامَ الهَاتِفِ. سَنُكَرِّرُ هٰذِهِ التَّجْرِبَةَ كُلَّ شَهْرٍ، وَلَوْ كَانَ الأَمْرُ بِيَدِي، لَجَعَلْتُ يَوْمَ الجُمُعَةِ يَوْمًا بِلَا شَاشَاتٍ لِكُلِّ الأُسَرِ.</a:t>
@@ -9508,11 +9577,12 @@
               <a:buNone/>
             </a:pPr>
             <a:r>
-              <a:rPr lang="en-US" sz="950" b="1" dirty="0">
+              <a:rPr lang="ar-SA" sz="950" b="1" dirty="0">
                 <a:solidFill>
                   <a:srgbClr val="FFFFFF"/>
                 </a:solidFill>
                 <a:latin typeface="Calibri" pitchFamily="34" charset="0"/>
+                <a:ea typeface="Amiri" pitchFamily="2" charset="-78"/>
                 <a:cs typeface="Amiri" pitchFamily="2" charset="-78"/>
               </a:rPr>
               <a:t>عِنْدَمَا قَرَّرَتْ … أَنْ تَقْضِيَ</a:t>
@@ -9573,11 +9643,12 @@
               <a:buNone/>
             </a:pPr>
             <a:r>
-              <a:rPr lang="en-US" sz="950" b="1" dirty="0">
+              <a:rPr lang="ar-SA" sz="950" b="1" dirty="0">
                 <a:solidFill>
                   <a:srgbClr val="FFFFFF"/>
                 </a:solidFill>
                 <a:latin typeface="Calibri" pitchFamily="34" charset="0"/>
+                <a:ea typeface="Amiri" pitchFamily="2" charset="-78"/>
                 <a:cs typeface="Amiri" pitchFamily="2" charset="-78"/>
               </a:rPr>
               <a:t>أَمَّا أُخْتِي … فَكَانَتْ</a:t>
@@ -9638,11 +9709,12 @@
               <a:buNone/>
             </a:pPr>
             <a:r>
-              <a:rPr lang="en-US" sz="950" b="1" dirty="0">
+              <a:rPr lang="ar-SA" sz="950" b="1" dirty="0">
                 <a:solidFill>
                   <a:srgbClr val="FFFFFF"/>
                 </a:solidFill>
                 <a:latin typeface="Calibri" pitchFamily="34" charset="0"/>
+                <a:ea typeface="Amiri" pitchFamily="2" charset="-78"/>
                 <a:cs typeface="Amiri" pitchFamily="2" charset="-78"/>
               </a:rPr>
               <a:t>فَجْأَةً … فَاخْتَبَأْنَا</a:t>
@@ -9703,11 +9775,12 @@
               <a:buNone/>
             </a:pPr>
             <a:r>
-              <a:rPr lang="en-US" sz="950" b="1" dirty="0">
+              <a:rPr lang="ar-SA" sz="950" b="1" dirty="0">
                 <a:solidFill>
                   <a:srgbClr val="FFFFFF"/>
                 </a:solidFill>
                 <a:latin typeface="Calibri" pitchFamily="34" charset="0"/>
+                <a:ea typeface="Amiri" pitchFamily="2" charset="-78"/>
                 <a:cs typeface="Amiri" pitchFamily="2" charset="-78"/>
               </a:rPr>
               <a:t>لَوْ كَانَ … لَجَعَلْتُ</a:t>
@@ -9841,6 +9914,7 @@
                   <a:srgbClr val="D4AF37"/>
                 </a:solidFill>
                 <a:latin typeface="Amiri" pitchFamily="2" charset="-78"/>
+                <a:ea typeface="Amiri" pitchFamily="2" charset="-78"/>
                 <a:cs typeface="Amiri" pitchFamily="2" charset="-78"/>
               </a:rPr>
               <a:t>م</a:t>
@@ -10098,6 +10172,7 @@
                   <a:srgbClr val="8A6D1E"/>
                 </a:solidFill>
                 <a:latin typeface="Amiri" pitchFamily="2" charset="-78"/>
+                <a:ea typeface="Amiri" pitchFamily="2" charset="-78"/>
                 <a:cs typeface="Amiri" pitchFamily="2" charset="-78"/>
               </a:rPr>
               <a:t>ب</a:t>
@@ -10162,6 +10237,7 @@
                   <a:srgbClr val="1B3B6F"/>
                 </a:solidFill>
                 <a:latin typeface="Amiri" pitchFamily="2" charset="-78"/>
+                <a:ea typeface="Amiri" pitchFamily="2" charset="-78"/>
                 <a:cs typeface="Amiri" pitchFamily="2" charset="-78"/>
               </a:rPr>
               <a:t>ب</a:t>
@@ -10213,6 +10289,7 @@
                   <a:srgbClr val="8A6D1E"/>
                 </a:solidFill>
                 <a:latin typeface="Amiri" pitchFamily="2" charset="-78"/>
+                <a:ea typeface="Amiri" pitchFamily="2" charset="-78"/>
                 <a:cs typeface="Amiri" pitchFamily="2" charset="-78"/>
               </a:rPr>
               <a:t>نَمُوذَجُ الإِجَابَةِ</a:t>
@@ -10326,6 +10403,7 @@
                   <a:srgbClr val="1F2A37"/>
                 </a:solidFill>
                 <a:latin typeface="Amiri" pitchFamily="2" charset="-78"/>
+                <a:ea typeface="Amiri" pitchFamily="2" charset="-78"/>
                 <a:cs typeface="Amiri" pitchFamily="2" charset="-78"/>
               </a:rPr>
               <a:t>تَغَيَّرَتْ طَرِيقَةُ قَضَاءِ الشَّبَابِ لِعُطْلَةِ نِهَايَةِ الأُسْبُوعِ كَثِيرًا. فِي المَاضِي كَانَ الأَطْفَالُ يَلْعَبُونَ فِي الحَيِّ حَتَّى المَغْرِبِ، وَكَانَتِ الأُسَرُ تَخْرُجُ مَعًا إِلَى الحَدَائِقِ وَالشَّوَاطِئِ، أَمَّا اليَوْمَ فَيَقْضِي كَثِيرٌ مِنَ الشَّبَابِ سَاعَاتٍ طَوِيلَةً أَمَامَ الأَلْعَابِ الإِلِكْتِرُونِيَّةِ أَوْ فِي المَرَاكِزِ التِّجَارِيَّةِ.</a:t>
@@ -10345,6 +10423,7 @@
                   <a:srgbClr val="1F2A37"/>
                 </a:solidFill>
                 <a:latin typeface="Amiri" pitchFamily="2" charset="-78"/>
+                <a:ea typeface="Amiri" pitchFamily="2" charset="-78"/>
                 <a:cs typeface="Amiri" pitchFamily="2" charset="-78"/>
               </a:rPr>
               <a:t>فِي رَأْيِي، لِهٰذَا التَّغْيِيرِ أَسْبَابٌ كَثِيرَةٌ: الدُّرُوسُ الإِضَافِيَّةُ تَأْخُذُ جُزْءًا كَبِيرًا مِنَ العُطْلَةِ، وَالمُدُنُ أَصْبَحَتْ أَكْثَرَ ازْدِحَامًا، وَالنُّزُهَاتُ صَارَتْ أَغْلَى مِنْ قَبْلُ، كَمَا أَنَّ كَثِيرًا مِنَ الآبَاءِ يَعْمَلُونَ حَتَّى فِي العُطْلَةِ.</a:t>
@@ -10364,6 +10443,7 @@
                   <a:srgbClr val="1F2A37"/>
                 </a:solidFill>
                 <a:latin typeface="Amiri" pitchFamily="2" charset="-78"/>
+                <a:ea typeface="Amiri" pitchFamily="2" charset="-78"/>
                 <a:cs typeface="Amiri" pitchFamily="2" charset="-78"/>
               </a:rPr>
               <a:t>غَيْرَ أَنَّ هُنَاكَ حُلُولًا بَسِيطَةً. فِي الشَّهْرِ المَاضِي نَظَّمَ نَادِي الشَّبَابِ فِي حَيِّنَا رِحْلَةَ مَشْيٍ مَجَّانِيَّةً إِلَى الغَابَةِ، فَشَارَكَ فِيهَا أَكْثَرُ مِنْ خَمْسِينَ شَابًّا، وَتَعَرَّفْتُ هُنَاكَ إِلَى أَصْدِقَاءَ جُدُدٍ، وَقَرَّرْنَا أَنْ نَمْشِيَ مَعًا كُلَّ شَهْرٍ.</a:t>
@@ -10383,6 +10463,7 @@
                   <a:srgbClr val="1F2A37"/>
                 </a:solidFill>
                 <a:latin typeface="Amiri" pitchFamily="2" charset="-78"/>
+                <a:ea typeface="Amiri" pitchFamily="2" charset="-78"/>
                 <a:cs typeface="Amiri" pitchFamily="2" charset="-78"/>
               </a:rPr>
               <a:t>صَحِيحٌ أَنَّ التِّكْنُولُوجْيَا جُزْءٌ مِنْ حَيَاتِنَا، غَيْرَ أَنَّ الطَّبِيعَةَ وَالأُسْرَةَ أَهَمُّ لِصِحَّتِنَا وَسَعَادَتِنَا. وَلَوْ خَصَّصَتْ كُلُّ أُسْرَةٍ يَوْمًا وَاحِدًا فِي الشَّهْرِ لِلْخُرُوجِ مَعًا، لَتَغَيَّرَتْ عَلَاقَاتُنَا كَثِيرًا.</a:t>
@@ -10481,11 +10562,12 @@
               <a:buNone/>
             </a:pPr>
             <a:r>
-              <a:rPr lang="en-US" sz="950" b="1" dirty="0">
+              <a:rPr lang="ar-SA" sz="950" b="1" dirty="0">
                 <a:solidFill>
                   <a:srgbClr val="FFFFFF"/>
                 </a:solidFill>
                 <a:latin typeface="Calibri" pitchFamily="34" charset="0"/>
+                <a:ea typeface="Amiri" pitchFamily="2" charset="-78"/>
                 <a:cs typeface="Amiri" pitchFamily="2" charset="-78"/>
               </a:rPr>
               <a:t>كَانَ الأَطْفَالُ يَلْعَبُونَ</a:t>
@@ -10546,11 +10628,12 @@
               <a:buNone/>
             </a:pPr>
             <a:r>
-              <a:rPr lang="en-US" sz="950" b="1" dirty="0">
+              <a:rPr lang="ar-SA" sz="950" b="1" dirty="0">
                 <a:solidFill>
                   <a:srgbClr val="FFFFFF"/>
                 </a:solidFill>
                 <a:latin typeface="Calibri" pitchFamily="34" charset="0"/>
+                <a:ea typeface="Amiri" pitchFamily="2" charset="-78"/>
                 <a:cs typeface="Amiri" pitchFamily="2" charset="-78"/>
               </a:rPr>
               <a:t>أَمَّا اليَوْمَ فَيَقْضِي</a:t>
@@ -10611,11 +10694,12 @@
               <a:buNone/>
             </a:pPr>
             <a:r>
-              <a:rPr lang="en-US" sz="950" b="1" dirty="0">
+              <a:rPr lang="ar-SA" sz="950" b="1" dirty="0">
                 <a:solidFill>
                   <a:srgbClr val="FFFFFF"/>
                 </a:solidFill>
                 <a:latin typeface="Calibri" pitchFamily="34" charset="0"/>
+                <a:ea typeface="Amiri" pitchFamily="2" charset="-78"/>
                 <a:cs typeface="Amiri" pitchFamily="2" charset="-78"/>
               </a:rPr>
               <a:t>أَكْثَرُ ازْدِحَامًا</a:t>
@@ -10676,11 +10760,12 @@
               <a:buNone/>
             </a:pPr>
             <a:r>
-              <a:rPr lang="en-US" sz="950" b="1" dirty="0">
+              <a:rPr lang="ar-SA" sz="950" b="1" dirty="0">
                 <a:solidFill>
                   <a:srgbClr val="FFFFFF"/>
                 </a:solidFill>
                 <a:latin typeface="Calibri" pitchFamily="34" charset="0"/>
+                <a:ea typeface="Amiri" pitchFamily="2" charset="-78"/>
                 <a:cs typeface="Amiri" pitchFamily="2" charset="-78"/>
               </a:rPr>
               <a:t>لَوْ خَصَّصَتْ … لَتَغَيَّرَتْ</a:t>
@@ -10814,6 +10899,7 @@
                   <a:srgbClr val="D4AF37"/>
                 </a:solidFill>
                 <a:latin typeface="Amiri" pitchFamily="2" charset="-78"/>
+                <a:ea typeface="Amiri" pitchFamily="2" charset="-78"/>
                 <a:cs typeface="Amiri" pitchFamily="2" charset="-78"/>
               </a:rPr>
               <a:t>م</a:t>
@@ -11134,6 +11220,7 @@
                   <a:srgbClr val="8A6D1E"/>
                 </a:solidFill>
                 <a:latin typeface="Amiri" pitchFamily="2" charset="-78"/>
+                <a:ea typeface="Amiri" pitchFamily="2" charset="-78"/>
                 <a:cs typeface="Amiri" pitchFamily="2" charset="-78"/>
               </a:rPr>
               <a:t>قَيِّمْ عَمَلَكَ</a:t>
@@ -12378,6 +12465,7 @@
                   <a:srgbClr val="FFFFFF"/>
                 </a:solidFill>
                 <a:latin typeface="Amiri" pitchFamily="2" charset="-78"/>
+                <a:ea typeface="Amiri" pitchFamily="2" charset="-78"/>
                 <a:cs typeface="Amiri" pitchFamily="2" charset="-78"/>
               </a:rPr>
               <a:t>أَحْسَنْتُمْ! إِلَى اللِّقَاءِ</a:t>
@@ -12530,6 +12618,7 @@
                   <a:srgbClr val="D4AF37"/>
                 </a:solidFill>
                 <a:latin typeface="Amiri" pitchFamily="2" charset="-78"/>
+                <a:ea typeface="Amiri" pitchFamily="2" charset="-78"/>
                 <a:cs typeface="Amiri" pitchFamily="2" charset="-78"/>
               </a:rPr>
               <a:t>وَرْشَةُ التَّدْرِيبِ</a:t>
@@ -12663,6 +12752,7 @@
                   <a:srgbClr val="D4AF37"/>
                 </a:solidFill>
                 <a:latin typeface="Amiri" pitchFamily="2" charset="-78"/>
+                <a:ea typeface="Amiri" pitchFamily="2" charset="-78"/>
                 <a:cs typeface="Amiri" pitchFamily="2" charset="-78"/>
               </a:rPr>
               <a:t>م</a:t>
@@ -12983,6 +13073,7 @@
                   <a:srgbClr val="8A6D1E"/>
                 </a:solidFill>
                 <a:latin typeface="Amiri" pitchFamily="2" charset="-78"/>
+                <a:ea typeface="Amiri" pitchFamily="2" charset="-78"/>
                 <a:cs typeface="Amiri" pitchFamily="2" charset="-78"/>
               </a:rPr>
               <a:t>آدَابُ الصَّفِّ</a:t>
@@ -14514,6 +14605,7 @@
                   <a:srgbClr val="D4AF37"/>
                 </a:solidFill>
                 <a:latin typeface="Amiri" pitchFamily="2" charset="-78"/>
+                <a:ea typeface="Amiri" pitchFamily="2" charset="-78"/>
                 <a:cs typeface="Amiri" pitchFamily="2" charset="-78"/>
               </a:rPr>
               <a:t>م</a:t>
@@ -14834,6 +14926,7 @@
                   <a:srgbClr val="8A6D1E"/>
                 </a:solidFill>
                 <a:latin typeface="Amiri" pitchFamily="2" charset="-78"/>
+                <a:ea typeface="Amiri" pitchFamily="2" charset="-78"/>
                 <a:cs typeface="Amiri" pitchFamily="2" charset="-78"/>
               </a:rPr>
               <a:t>خَرِيطَةُ الوَرْشَةِ</a:t>
@@ -15148,6 +15241,7 @@
                   <a:srgbClr val="1B3B6F"/>
                 </a:solidFill>
                 <a:latin typeface="Amiri" pitchFamily="2" charset="-78"/>
+                <a:ea typeface="Amiri" pitchFamily="2" charset="-78"/>
                 <a:cs typeface="Amiri" pitchFamily="2" charset="-78"/>
               </a:rPr>
               <a:t>كَيْفَ</a:t>
@@ -15424,6 +15518,7 @@
                   <a:srgbClr val="1E6B52"/>
                 </a:solidFill>
                 <a:latin typeface="Amiri" pitchFamily="2" charset="-78"/>
+                <a:ea typeface="Amiri" pitchFamily="2" charset="-78"/>
                 <a:cs typeface="Amiri" pitchFamily="2" charset="-78"/>
               </a:rPr>
               <a:t>الاسْتِمَارَةُ</a:t>
@@ -15700,6 +15795,7 @@
                   <a:srgbClr val="1E6B52"/>
                 </a:solidFill>
                 <a:latin typeface="Amiri" pitchFamily="2" charset="-78"/>
+                <a:ea typeface="Amiri" pitchFamily="2" charset="-78"/>
                 <a:cs typeface="Amiri" pitchFamily="2" charset="-78"/>
               </a:rPr>
               <a:t>الرِّسَالَةُ</a:t>
@@ -15976,6 +16072,7 @@
                   <a:srgbClr val="1E6B52"/>
                 </a:solidFill>
                 <a:latin typeface="Amiri" pitchFamily="2" charset="-78"/>
+                <a:ea typeface="Amiri" pitchFamily="2" charset="-78"/>
                 <a:cs typeface="Amiri" pitchFamily="2" charset="-78"/>
               </a:rPr>
               <a:t>المَقَالُ</a:t>
@@ -16252,6 +16349,7 @@
                   <a:srgbClr val="8A6D1E"/>
                 </a:solidFill>
                 <a:latin typeface="Amiri" pitchFamily="2" charset="-78"/>
+                <a:ea typeface="Amiri" pitchFamily="2" charset="-78"/>
                 <a:cs typeface="Amiri" pitchFamily="2" charset="-78"/>
               </a:rPr>
               <a:t>قَيِّمْ</a:t>
@@ -16495,6 +16593,7 @@
                   <a:srgbClr val="D4AF37"/>
                 </a:solidFill>
                 <a:latin typeface="Amiri" pitchFamily="2" charset="-78"/>
+                <a:ea typeface="Amiri" pitchFamily="2" charset="-78"/>
                 <a:cs typeface="Amiri" pitchFamily="2" charset="-78"/>
               </a:rPr>
               <a:t>م</a:t>
@@ -16815,6 +16914,7 @@
                   <a:srgbClr val="8A6D1E"/>
                 </a:solidFill>
                 <a:latin typeface="Amiri" pitchFamily="2" charset="-78"/>
+                <a:ea typeface="Amiri" pitchFamily="2" charset="-78"/>
                 <a:cs typeface="Amiri" pitchFamily="2" charset="-78"/>
               </a:rPr>
               <a:t>امْتِحَانُ الكِتَابَةِ</a:t>
@@ -17439,6 +17539,7 @@
                   <a:srgbClr val="1B3B6F"/>
                 </a:solidFill>
                 <a:latin typeface="Amiri" pitchFamily="2" charset="-78"/>
+                <a:ea typeface="Amiri" pitchFamily="2" charset="-78"/>
                 <a:cs typeface="Amiri" pitchFamily="2" charset="-78"/>
               </a:rPr>
               <a:t>خَرَجْنَا فِي السَّابِعَةِ، وَاسْتَغْرَقَتِ الرِّحْلَةُ سَاعَةً</a:t>
@@ -17538,6 +17639,7 @@
                   <a:srgbClr val="1B3B6F"/>
                 </a:solidFill>
                 <a:latin typeface="Amiri" pitchFamily="2" charset="-78"/>
+                <a:ea typeface="Amiri" pitchFamily="2" charset="-78"/>
                 <a:cs typeface="Amiri" pitchFamily="2" charset="-78"/>
               </a:rPr>
               <a:t>كَانَ أَلَذَّ سَمَكٍ أَكَلْتُهُ</a:t>
@@ -17637,6 +17739,7 @@
                   <a:srgbClr val="1B3B6F"/>
                 </a:solidFill>
                 <a:latin typeface="Amiri" pitchFamily="2" charset="-78"/>
+                <a:ea typeface="Amiri" pitchFamily="2" charset="-78"/>
                 <a:cs typeface="Amiri" pitchFamily="2" charset="-78"/>
               </a:rPr>
               <a:t>فِي الشَّهْرِ القَادِمِ سَنَزُورُ …</a:t>
@@ -17808,6 +17911,7 @@
                   <a:srgbClr val="D4AF37"/>
                 </a:solidFill>
                 <a:latin typeface="Amiri" pitchFamily="2" charset="-78"/>
+                <a:ea typeface="Amiri" pitchFamily="2" charset="-78"/>
                 <a:cs typeface="Amiri" pitchFamily="2" charset="-78"/>
               </a:rPr>
               <a:t>م</a:t>
@@ -18128,6 +18232,7 @@
                   <a:srgbClr val="8A6D1E"/>
                 </a:solidFill>
                 <a:latin typeface="Amiri" pitchFamily="2" charset="-78"/>
+                <a:ea typeface="Amiri" pitchFamily="2" charset="-78"/>
                 <a:cs typeface="Amiri" pitchFamily="2" charset="-78"/>
               </a:rPr>
               <a:t>اسْتِمَارَةُ الرِّحْلَةِ المَدْرَسِيَّةِ</a:t>
@@ -18484,6 +18589,7 @@
                   <a:srgbClr val="1B3B6F"/>
                 </a:solidFill>
                 <a:latin typeface="Amiri" pitchFamily="2" charset="-78"/>
+                <a:ea typeface="Amiri" pitchFamily="2" charset="-78"/>
                 <a:cs typeface="Amiri" pitchFamily="2" charset="-78"/>
               </a:rPr>
               <a:t>الاسْمُ وَالصَّفُّ</a:t>
@@ -18728,6 +18834,7 @@
                   <a:srgbClr val="1B3B6F"/>
                 </a:solidFill>
                 <a:latin typeface="Amiri" pitchFamily="2" charset="-78"/>
+                <a:ea typeface="Amiri" pitchFamily="2" charset="-78"/>
                 <a:cs typeface="Amiri" pitchFamily="2" charset="-78"/>
               </a:rPr>
               <a:t>المَكَانُ الَّذِي تَخْتَارُهُ</a:t>
@@ -18972,6 +19079,7 @@
                   <a:srgbClr val="1B3B6F"/>
                 </a:solidFill>
                 <a:latin typeface="Amiri" pitchFamily="2" charset="-78"/>
+                <a:ea typeface="Amiri" pitchFamily="2" charset="-78"/>
                 <a:cs typeface="Amiri" pitchFamily="2" charset="-78"/>
               </a:rPr>
               <a:t>وَسِيلَةُ المُوَاصَلَاتِ المُفَضَّلَةُ</a:t>
@@ -19216,6 +19324,7 @@
                   <a:srgbClr val="1B3B6F"/>
                 </a:solidFill>
                 <a:latin typeface="Amiri" pitchFamily="2" charset="-78"/>
+                <a:ea typeface="Amiri" pitchFamily="2" charset="-78"/>
                 <a:cs typeface="Amiri" pitchFamily="2" charset="-78"/>
               </a:rPr>
               <a:t>طَعَامٌ لَا تَأْكُلُهُ</a:t>
@@ -19460,6 +19569,7 @@
                   <a:srgbClr val="1B3B6F"/>
                 </a:solidFill>
                 <a:latin typeface="Amiri" pitchFamily="2" charset="-78"/>
+                <a:ea typeface="Amiri" pitchFamily="2" charset="-78"/>
                 <a:cs typeface="Amiri" pitchFamily="2" charset="-78"/>
               </a:rPr>
               <a:t>مُشْكِلَةٌ صِحِّيَّةٌ (إِنْ وُجِدَتْ)</a:t>
@@ -19704,6 +19814,7 @@
                   <a:srgbClr val="1B3B6F"/>
                 </a:solidFill>
                 <a:latin typeface="Amiri" pitchFamily="2" charset="-78"/>
+                <a:ea typeface="Amiri" pitchFamily="2" charset="-78"/>
                 <a:cs typeface="Amiri" pitchFamily="2" charset="-78"/>
               </a:rPr>
               <a:t>رَقْمُ هَاتِفِ أَحَدِ الوَالِدَيْنِ</a:t>
@@ -19948,6 +20059,7 @@
                   <a:srgbClr val="1B3B6F"/>
                 </a:solidFill>
                 <a:latin typeface="Amiri" pitchFamily="2" charset="-78"/>
+                <a:ea typeface="Amiri" pitchFamily="2" charset="-78"/>
                 <a:cs typeface="Amiri" pitchFamily="2" charset="-78"/>
               </a:rPr>
               <a:t>نَشَاطٌ تُرِيدُ أَنْ تُجَرِّبَهُ</a:t>
@@ -20127,6 +20239,7 @@
                   <a:srgbClr val="1B3B6F"/>
                 </a:solidFill>
                 <a:latin typeface="Amiri" pitchFamily="2" charset="-78"/>
+                <a:ea typeface="Amiri" pitchFamily="2" charset="-78"/>
                 <a:cs typeface="Amiri" pitchFamily="2" charset="-78"/>
               </a:rPr>
               <a:t>جُمْلَةٌ: لِمَاذَا اخْتَرْتَ هٰذَا المَكَانَ؟</a:t>
@@ -20336,6 +20449,7 @@
                   <a:srgbClr val="D4AF37"/>
                 </a:solidFill>
                 <a:latin typeface="Amiri" pitchFamily="2" charset="-78"/>
+                <a:ea typeface="Amiri" pitchFamily="2" charset="-78"/>
                 <a:cs typeface="Amiri" pitchFamily="2" charset="-78"/>
               </a:rPr>
               <a:t>م</a:t>
@@ -20656,6 +20770,7 @@
                   <a:srgbClr val="8A6D1E"/>
                 </a:solidFill>
                 <a:latin typeface="Amiri" pitchFamily="2" charset="-78"/>
+                <a:ea typeface="Amiri" pitchFamily="2" charset="-78"/>
                 <a:cs typeface="Amiri" pitchFamily="2" charset="-78"/>
               </a:rPr>
               <a:t>نَمُوذَجُ الإِجَابَةِ</a:t>
@@ -20974,6 +21089,7 @@
                   <a:srgbClr val="1B3B6F"/>
                 </a:solidFill>
                 <a:latin typeface="Amiri" pitchFamily="2" charset="-78"/>
+                <a:ea typeface="Amiri" pitchFamily="2" charset="-78"/>
                 <a:cs typeface="Amiri" pitchFamily="2" charset="-78"/>
               </a:rPr>
               <a:t>عَادِلٌ حَسَنٌ، الصَّفُّ العَاشِرُ</a:t>
@@ -21012,6 +21128,7 @@
                   <a:srgbClr val="1B3B6F"/>
                 </a:solidFill>
                 <a:latin typeface="Amiri" pitchFamily="2" charset="-78"/>
+                <a:ea typeface="Amiri" pitchFamily="2" charset="-78"/>
                 <a:cs typeface="Amiri" pitchFamily="2" charset="-78"/>
               </a:rPr>
               <a:t>الاسْمُ وَالصَّفُّ</a:t>
@@ -21153,6 +21270,7 @@
                   <a:srgbClr val="1B3B6F"/>
                 </a:solidFill>
                 <a:latin typeface="Amiri" pitchFamily="2" charset="-78"/>
+                <a:ea typeface="Amiri" pitchFamily="2" charset="-78"/>
                 <a:cs typeface="Amiri" pitchFamily="2" charset="-78"/>
               </a:rPr>
               <a:t>المُتْحَفُ الوَطَنِيُّ</a:t>
@@ -21191,6 +21309,7 @@
                   <a:srgbClr val="1B3B6F"/>
                 </a:solidFill>
                 <a:latin typeface="Amiri" pitchFamily="2" charset="-78"/>
+                <a:ea typeface="Amiri" pitchFamily="2" charset="-78"/>
                 <a:cs typeface="Amiri" pitchFamily="2" charset="-78"/>
               </a:rPr>
               <a:t>المَكَانُ الَّذِي تَخْتَارُهُ</a:t>
@@ -21332,6 +21451,7 @@
                   <a:srgbClr val="1B3B6F"/>
                 </a:solidFill>
                 <a:latin typeface="Amiri" pitchFamily="2" charset="-78"/>
+                <a:ea typeface="Amiri" pitchFamily="2" charset="-78"/>
                 <a:cs typeface="Amiri" pitchFamily="2" charset="-78"/>
               </a:rPr>
               <a:t>الحَافِلَةُ</a:t>
@@ -21370,6 +21490,7 @@
                   <a:srgbClr val="1B3B6F"/>
                 </a:solidFill>
                 <a:latin typeface="Amiri" pitchFamily="2" charset="-78"/>
+                <a:ea typeface="Amiri" pitchFamily="2" charset="-78"/>
                 <a:cs typeface="Amiri" pitchFamily="2" charset="-78"/>
               </a:rPr>
               <a:t>وَسِيلَةُ المُوَاصَلَاتِ المُفَضَّلَةُ</a:t>
@@ -21511,6 +21632,7 @@
                   <a:srgbClr val="1B3B6F"/>
                 </a:solidFill>
                 <a:latin typeface="Amiri" pitchFamily="2" charset="-78"/>
+                <a:ea typeface="Amiri" pitchFamily="2" charset="-78"/>
                 <a:cs typeface="Amiri" pitchFamily="2" charset="-78"/>
               </a:rPr>
               <a:t>البَيْضُ</a:t>
@@ -21549,6 +21671,7 @@
                   <a:srgbClr val="1B3B6F"/>
                 </a:solidFill>
                 <a:latin typeface="Amiri" pitchFamily="2" charset="-78"/>
+                <a:ea typeface="Amiri" pitchFamily="2" charset="-78"/>
                 <a:cs typeface="Amiri" pitchFamily="2" charset="-78"/>
               </a:rPr>
               <a:t>طَعَامٌ لَا تَأْكُلُهُ</a:t>
@@ -21690,6 +21813,7 @@
                   <a:srgbClr val="1B3B6F"/>
                 </a:solidFill>
                 <a:latin typeface="Amiri" pitchFamily="2" charset="-78"/>
+                <a:ea typeface="Amiri" pitchFamily="2" charset="-78"/>
                 <a:cs typeface="Amiri" pitchFamily="2" charset="-78"/>
               </a:rPr>
               <a:t>الرَّبْوُ</a:t>
@@ -21728,6 +21852,7 @@
                   <a:srgbClr val="1B3B6F"/>
                 </a:solidFill>
                 <a:latin typeface="Amiri" pitchFamily="2" charset="-78"/>
+                <a:ea typeface="Amiri" pitchFamily="2" charset="-78"/>
                 <a:cs typeface="Amiri" pitchFamily="2" charset="-78"/>
               </a:rPr>
               <a:t>مُشْكِلَةٌ صِحِّيَّةٌ (إِنْ وُجِدَتْ)</a:t>
@@ -21869,6 +21994,7 @@
                   <a:srgbClr val="1B3B6F"/>
                 </a:solidFill>
                 <a:latin typeface="Amiri" pitchFamily="2" charset="-78"/>
+                <a:ea typeface="Amiri" pitchFamily="2" charset="-78"/>
                 <a:cs typeface="Amiri" pitchFamily="2" charset="-78"/>
               </a:rPr>
               <a:t>٠٧٧٠١٢٣٤٥٦٧</a:t>
@@ -21907,6 +22033,7 @@
                   <a:srgbClr val="1B3B6F"/>
                 </a:solidFill>
                 <a:latin typeface="Amiri" pitchFamily="2" charset="-78"/>
+                <a:ea typeface="Amiri" pitchFamily="2" charset="-78"/>
                 <a:cs typeface="Amiri" pitchFamily="2" charset="-78"/>
               </a:rPr>
               <a:t>رَقْمُ هَاتِفِ أَحَدِ الوَالِدَيْنِ</a:t>
@@ -22048,6 +22175,7 @@
                   <a:srgbClr val="1B3B6F"/>
                 </a:solidFill>
                 <a:latin typeface="Amiri" pitchFamily="2" charset="-78"/>
+                <a:ea typeface="Amiri" pitchFamily="2" charset="-78"/>
                 <a:cs typeface="Amiri" pitchFamily="2" charset="-78"/>
               </a:rPr>
               <a:t>رَسْمُ الخَرَائِطِ القَدِيمَةِ</a:t>
@@ -22086,6 +22214,7 @@
                   <a:srgbClr val="1B3B6F"/>
                 </a:solidFill>
                 <a:latin typeface="Amiri" pitchFamily="2" charset="-78"/>
+                <a:ea typeface="Amiri" pitchFamily="2" charset="-78"/>
                 <a:cs typeface="Amiri" pitchFamily="2" charset="-78"/>
               </a:rPr>
               <a:t>نَشَاطٌ تُرِيدُ أَنْ تُجَرِّبَهُ</a:t>
@@ -22227,6 +22356,7 @@
                   <a:srgbClr val="1B3B6F"/>
                 </a:solidFill>
                 <a:latin typeface="Amiri" pitchFamily="2" charset="-78"/>
+                <a:ea typeface="Amiri" pitchFamily="2" charset="-78"/>
                 <a:cs typeface="Amiri" pitchFamily="2" charset="-78"/>
               </a:rPr>
               <a:t>اخْتَرْتُ المُتْحَفَ لِأَنِّي أُحِبُّ التَّارِيخَ وَأُرِيدُ أَنْ أَرَى الآثَارَ.</a:t>
@@ -22265,6 +22395,7 @@
                   <a:srgbClr val="1B3B6F"/>
                 </a:solidFill>
                 <a:latin typeface="Amiri" pitchFamily="2" charset="-78"/>
+                <a:ea typeface="Amiri" pitchFamily="2" charset="-78"/>
                 <a:cs typeface="Amiri" pitchFamily="2" charset="-78"/>
               </a:rPr>
               <a:t>جُمْلَةٌ: لِمَاذَا اخْتَرْتَ هٰذَا المَكَانَ؟</a:t>
@@ -22474,6 +22605,7 @@
                   <a:srgbClr val="D4AF37"/>
                 </a:solidFill>
                 <a:latin typeface="Amiri" pitchFamily="2" charset="-78"/>
+                <a:ea typeface="Amiri" pitchFamily="2" charset="-78"/>
                 <a:cs typeface="Amiri" pitchFamily="2" charset="-78"/>
               </a:rPr>
               <a:t>م</a:t>
@@ -22794,6 +22926,7 @@
                   <a:srgbClr val="8A6D1E"/>
                 </a:solidFill>
                 <a:latin typeface="Amiri" pitchFamily="2" charset="-78"/>
+                <a:ea typeface="Amiri" pitchFamily="2" charset="-78"/>
                 <a:cs typeface="Amiri" pitchFamily="2" charset="-78"/>
               </a:rPr>
               <a:t>رِسَالَةٌ عَنْ نُزْهَةٍ</a:t>
@@ -23269,6 +23402,7 @@
                   <a:srgbClr val="1B3B6F"/>
                 </a:solidFill>
                 <a:latin typeface="Amiri" pitchFamily="2" charset="-78"/>
+                <a:ea typeface="Amiri" pitchFamily="2" charset="-78"/>
                 <a:cs typeface="Amiri" pitchFamily="2" charset="-78"/>
               </a:rPr>
               <a:t>خَرَجْنَا فِي السَّاعَةِ …</a:t>
@@ -23345,6 +23479,7 @@
                   <a:srgbClr val="1B3B6F"/>
                 </a:solidFill>
                 <a:latin typeface="Amiri" pitchFamily="2" charset="-78"/>
+                <a:ea typeface="Amiri" pitchFamily="2" charset="-78"/>
                 <a:cs typeface="Amiri" pitchFamily="2" charset="-78"/>
               </a:rPr>
               <a:t>ذَهَبْنَا بِالسَّيَّارَةِ</a:t>
@@ -23421,6 +23556,7 @@
                   <a:srgbClr val="1B3B6F"/>
                 </a:solidFill>
                 <a:latin typeface="Amiri" pitchFamily="2" charset="-78"/>
+                <a:ea typeface="Amiri" pitchFamily="2" charset="-78"/>
                 <a:cs typeface="Amiri" pitchFamily="2" charset="-78"/>
               </a:rPr>
               <a:t>كَانَ اليَوْمُ مُمْتِعًا، لٰكِنْ …</a:t>
@@ -23497,6 +23633,7 @@
                   <a:srgbClr val="1B3B6F"/>
                 </a:solidFill>
                 <a:latin typeface="Amiri" pitchFamily="2" charset="-78"/>
+                <a:ea typeface="Amiri" pitchFamily="2" charset="-78"/>
                 <a:cs typeface="Amiri" pitchFamily="2" charset="-78"/>
               </a:rPr>
               <a:t>هَلْ تَأْتِي مَعَنَا؟</a:t>
@@ -23668,6 +23805,7 @@
                   <a:srgbClr val="D4AF37"/>
                 </a:solidFill>
                 <a:latin typeface="Amiri" pitchFamily="2" charset="-78"/>
+                <a:ea typeface="Amiri" pitchFamily="2" charset="-78"/>
                 <a:cs typeface="Amiri" pitchFamily="2" charset="-78"/>
               </a:rPr>
               <a:t>م</a:t>
@@ -23988,6 +24126,7 @@
                   <a:srgbClr val="8A6D1E"/>
                 </a:solidFill>
                 <a:latin typeface="Amiri" pitchFamily="2" charset="-78"/>
+                <a:ea typeface="Amiri" pitchFamily="2" charset="-78"/>
                 <a:cs typeface="Amiri" pitchFamily="2" charset="-78"/>
               </a:rPr>
               <a:t>نَصُّ السُّؤَالِ</a:t>
@@ -24268,6 +24407,7 @@
                   <a:srgbClr val="1B3B6F"/>
                 </a:solidFill>
                 <a:latin typeface="Amiri" pitchFamily="2" charset="-78"/>
+                <a:ea typeface="Amiri" pitchFamily="2" charset="-78"/>
                 <a:cs typeface="Amiri" pitchFamily="2" charset="-78"/>
               </a:rPr>
               <a:t>ذَهَبْتَ فِي نُزْهَةٍ فِي نِهَايَةِ الأُسْبُوعِ. اكْتُبْ رِسَالَةً إِلَى صَدِيقِكَ (٨٠–٩٠ كَلِمَةً).</a:t>
@@ -24409,6 +24549,7 @@
                   <a:srgbClr val="1B3B6F"/>
                 </a:solidFill>
                 <a:latin typeface="Amiri" pitchFamily="2" charset="-78"/>
+                <a:ea typeface="Amiri" pitchFamily="2" charset="-78"/>
                 <a:cs typeface="Amiri" pitchFamily="2" charset="-78"/>
               </a:rPr>
               <a:t>أَيْنَ ذَهَبْتَ؟ وَمَتَى؟ وَكَيْفَ؟</a:t>
@@ -24550,6 +24691,7 @@
                   <a:srgbClr val="1B3B6F"/>
                 </a:solidFill>
                 <a:latin typeface="Amiri" pitchFamily="2" charset="-78"/>
+                <a:ea typeface="Amiri" pitchFamily="2" charset="-78"/>
                 <a:cs typeface="Amiri" pitchFamily="2" charset="-78"/>
               </a:rPr>
               <a:t>مَاذَا فَعَلْتَ هُنَاكَ؟</a:t>
@@ -24691,6 +24833,7 @@
                   <a:srgbClr val="1B3B6F"/>
                 </a:solidFill>
                 <a:latin typeface="Amiri" pitchFamily="2" charset="-78"/>
+                <a:ea typeface="Amiri" pitchFamily="2" charset="-78"/>
                 <a:cs typeface="Amiri" pitchFamily="2" charset="-78"/>
               </a:rPr>
               <a:t>مَاذَا أَكَلْتَ؟ وَمَا رَأْيُكَ فِي اليَوْمِ؟</a:t>
@@ -24832,6 +24975,7 @@
                   <a:srgbClr val="1B3B6F"/>
                 </a:solidFill>
                 <a:latin typeface="Amiri" pitchFamily="2" charset="-78"/>
+                <a:ea typeface="Amiri" pitchFamily="2" charset="-78"/>
                 <a:cs typeface="Amiri" pitchFamily="2" charset="-78"/>
               </a:rPr>
               <a:t>مَا خُطَّتُكَ لِلنُّزْهَةِ القَادِمَةِ؟ ادْعُ صَدِيقَكَ.</a:t>
@@ -25041,6 +25185,7 @@
                   <a:srgbClr val="D4AF37"/>
                 </a:solidFill>
                 <a:latin typeface="Amiri" pitchFamily="2" charset="-78"/>
+                <a:ea typeface="Amiri" pitchFamily="2" charset="-78"/>
                 <a:cs typeface="Amiri" pitchFamily="2" charset="-78"/>
               </a:rPr>
               <a:t>م</a:t>
@@ -25361,6 +25506,7 @@
                   <a:srgbClr val="8A6D1E"/>
                 </a:solidFill>
                 <a:latin typeface="Amiri" pitchFamily="2" charset="-78"/>
+                <a:ea typeface="Amiri" pitchFamily="2" charset="-78"/>
                 <a:cs typeface="Amiri" pitchFamily="2" charset="-78"/>
               </a:rPr>
               <a:t>قَوَالِبُ الكِتَابَةِ</a:t>
@@ -25641,6 +25787,7 @@
                   <a:srgbClr val="1B3B6F"/>
                 </a:solidFill>
                 <a:latin typeface="Amiri" pitchFamily="2" charset="-78"/>
+                <a:ea typeface="Amiri" pitchFamily="2" charset="-78"/>
                 <a:cs typeface="Amiri" pitchFamily="2" charset="-78"/>
               </a:rPr>
               <a:t>مَرْحَبًا يَا ______ ، كَيْفَ حَالُكَ؟</a:t>
@@ -25847,6 +25994,7 @@
                   <a:srgbClr val="1B3B6F"/>
                 </a:solidFill>
                 <a:latin typeface="Amiri" pitchFamily="2" charset="-78"/>
+                <a:ea typeface="Amiri" pitchFamily="2" charset="-78"/>
                 <a:cs typeface="Amiri" pitchFamily="2" charset="-78"/>
               </a:rPr>
               <a:t>أَمْسِ ذَهَبْتُ إِلَى ______ . خَرَجْنَا فِي ______ وَذَهَبْنَا ______ .</a:t>
@@ -26053,6 +26201,7 @@
                   <a:srgbClr val="1B3B6F"/>
                 </a:solidFill>
                 <a:latin typeface="Amiri" pitchFamily="2" charset="-78"/>
+                <a:ea typeface="Amiri" pitchFamily="2" charset="-78"/>
                 <a:cs typeface="Amiri" pitchFamily="2" charset="-78"/>
               </a:rPr>
               <a:t>______ ، ثُمَّ ______ .</a:t>
@@ -26259,6 +26408,7 @@
                   <a:srgbClr val="1B3B6F"/>
                 </a:solidFill>
                 <a:latin typeface="Amiri" pitchFamily="2" charset="-78"/>
+                <a:ea typeface="Amiri" pitchFamily="2" charset="-78"/>
                 <a:cs typeface="Amiri" pitchFamily="2" charset="-78"/>
               </a:rPr>
               <a:t>أَكَلْنَا ______ . كَانَ اليَوْمُ ______ ، لٰكِنْ ______ .</a:t>
@@ -26465,6 +26615,7 @@
                   <a:srgbClr val="1B3B6F"/>
                 </a:solidFill>
                 <a:latin typeface="Amiri" pitchFamily="2" charset="-78"/>
+                <a:ea typeface="Amiri" pitchFamily="2" charset="-78"/>
                 <a:cs typeface="Amiri" pitchFamily="2" charset="-78"/>
               </a:rPr>
               <a:t>فِي الشَّهْرِ القَادِمِ سَنَذْهَبُ إِلَى ______ . هَلْ تَأْتِي مَعَنَا؟</a:t>
@@ -26671,6 +26822,7 @@
                   <a:srgbClr val="1B3B6F"/>
                 </a:solidFill>
                 <a:latin typeface="Amiri" pitchFamily="2" charset="-78"/>
+                <a:ea typeface="Amiri" pitchFamily="2" charset="-78"/>
                 <a:cs typeface="Amiri" pitchFamily="2" charset="-78"/>
               </a:rPr>
               <a:t>مَعَ السَّلَامَةِ، ______</a:t>
@@ -26910,13 +27062,9 @@
     <a:fontScheme name="Office">
       <a:majorFont>
         <a:latin typeface="Calibri Light" panose="020F0302020204030204"/>
-        <a:ea typeface=""/>
-        <a:cs typeface=""/>
-        <a:font script="Jpan" typeface="游ゴシック Light"/>
-        <a:font script="Hang" typeface="맑은 고딕"/>
-        <a:font script="Hans" typeface="等线 Light"/>
-        <a:font script="Hant" typeface="新細明體"/>
-        <a:font script="Arab" typeface="Times New Roman"/>
+        <a:ea typeface="Amiri" pitchFamily="2" charset="-78"/>
+        <a:cs typeface="Amiri" pitchFamily="2" charset="-78"/>
+        <a:font script="Arab" typeface="Amiri"/>
         <a:font script="Hebr" typeface="Times New Roman"/>
         <a:font script="Thai" typeface="Angsana New"/>
         <a:font script="Ethi" typeface="Nyala"/>
@@ -26962,13 +27110,9 @@
       </a:majorFont>
       <a:minorFont>
         <a:latin typeface="Calibri" panose="020F0502020204030204"/>
-        <a:ea typeface=""/>
-        <a:cs typeface=""/>
-        <a:font script="Jpan" typeface="游ゴシック"/>
-        <a:font script="Hang" typeface="맑은 고딕"/>
-        <a:font script="Hans" typeface="等线"/>
-        <a:font script="Hant" typeface="新細明體"/>
-        <a:font script="Arab" typeface="Arial"/>
+        <a:ea typeface="Amiri" pitchFamily="2" charset="-78"/>
+        <a:cs typeface="Amiri" pitchFamily="2" charset="-78"/>
+        <a:font script="Arab" typeface="Amiri"/>
         <a:font script="Hebr" typeface="Arial"/>
         <a:font script="Thai" typeface="Cordia New"/>
         <a:font script="Ethi" typeface="Nyala"/>

--- a/Topic_A/Exam_Practice/AT-A-L10_Writing_Workshop_Reading_and_Listening_Exam_Skills.pptx
+++ b/Topic_A/Exam_Practice/AT-A-L10_Writing_Workshop_Reading_and_Listening_Exam_Skills.pptx
@@ -3848,7 +3848,7 @@
                 <a:solidFill>
                   <a:srgbClr val="FFFFFF"/>
                 </a:solidFill>
-                <a:latin typeface="Calibri" pitchFamily="34" charset="0"/>
+                <a:latin typeface="Amiri" pitchFamily="2" charset="-78"/>
                 <a:ea typeface="Amiri" pitchFamily="2" charset="-78"/>
                 <a:cs typeface="Amiri" pitchFamily="2" charset="-78"/>
               </a:rPr>
@@ -3914,7 +3914,7 @@
                 <a:solidFill>
                   <a:srgbClr val="FFFFFF"/>
                 </a:solidFill>
-                <a:latin typeface="Calibri" pitchFamily="34" charset="0"/>
+                <a:latin typeface="Amiri" pitchFamily="2" charset="-78"/>
                 <a:ea typeface="Amiri" pitchFamily="2" charset="-78"/>
                 <a:cs typeface="Amiri" pitchFamily="2" charset="-78"/>
               </a:rPr>
@@ -3980,7 +3980,7 @@
                 <a:solidFill>
                   <a:srgbClr val="FFFFFF"/>
                 </a:solidFill>
-                <a:latin typeface="Calibri" pitchFamily="34" charset="0"/>
+                <a:latin typeface="Amiri" pitchFamily="2" charset="-78"/>
                 <a:ea typeface="Amiri" pitchFamily="2" charset="-78"/>
                 <a:cs typeface="Amiri" pitchFamily="2" charset="-78"/>
               </a:rPr>
@@ -4046,7 +4046,7 @@
                 <a:solidFill>
                   <a:srgbClr val="FFFFFF"/>
                 </a:solidFill>
-                <a:latin typeface="Calibri" pitchFamily="34" charset="0"/>
+                <a:latin typeface="Amiri" pitchFamily="2" charset="-78"/>
                 <a:ea typeface="Amiri" pitchFamily="2" charset="-78"/>
                 <a:cs typeface="Amiri" pitchFamily="2" charset="-78"/>
               </a:rPr>
@@ -4844,7 +4844,7 @@
                 <a:solidFill>
                   <a:srgbClr val="FFFFFF"/>
                 </a:solidFill>
-                <a:latin typeface="Calibri" pitchFamily="34" charset="0"/>
+                <a:latin typeface="Amiri" pitchFamily="2" charset="-78"/>
                 <a:ea typeface="Amiri" pitchFamily="2" charset="-78"/>
                 <a:cs typeface="Amiri" pitchFamily="2" charset="-78"/>
               </a:rPr>
@@ -4910,7 +4910,7 @@
                 <a:solidFill>
                   <a:srgbClr val="FFFFFF"/>
                 </a:solidFill>
-                <a:latin typeface="Calibri" pitchFamily="34" charset="0"/>
+                <a:latin typeface="Amiri" pitchFamily="2" charset="-78"/>
                 <a:ea typeface="Amiri" pitchFamily="2" charset="-78"/>
                 <a:cs typeface="Amiri" pitchFamily="2" charset="-78"/>
               </a:rPr>
@@ -4976,7 +4976,7 @@
                 <a:solidFill>
                   <a:srgbClr val="FFFFFF"/>
                 </a:solidFill>
-                <a:latin typeface="Calibri" pitchFamily="34" charset="0"/>
+                <a:latin typeface="Amiri" pitchFamily="2" charset="-78"/>
                 <a:ea typeface="Amiri" pitchFamily="2" charset="-78"/>
                 <a:cs typeface="Amiri" pitchFamily="2" charset="-78"/>
               </a:rPr>
@@ -5042,7 +5042,7 @@
                 <a:solidFill>
                   <a:srgbClr val="FFFFFF"/>
                 </a:solidFill>
-                <a:latin typeface="Calibri" pitchFamily="34" charset="0"/>
+                <a:latin typeface="Amiri" pitchFamily="2" charset="-78"/>
                 <a:ea typeface="Amiri" pitchFamily="2" charset="-78"/>
                 <a:cs typeface="Amiri" pitchFamily="2" charset="-78"/>
               </a:rPr>
@@ -8596,7 +8596,7 @@
                 <a:solidFill>
                   <a:srgbClr val="FFFFFF"/>
                 </a:solidFill>
-                <a:latin typeface="Calibri" pitchFamily="34" charset="0"/>
+                <a:latin typeface="Amiri" pitchFamily="2" charset="-78"/>
                 <a:ea typeface="Amiri" pitchFamily="2" charset="-78"/>
                 <a:cs typeface="Amiri" pitchFamily="2" charset="-78"/>
               </a:rPr>
@@ -8662,7 +8662,7 @@
                 <a:solidFill>
                   <a:srgbClr val="FFFFFF"/>
                 </a:solidFill>
-                <a:latin typeface="Calibri" pitchFamily="34" charset="0"/>
+                <a:latin typeface="Amiri" pitchFamily="2" charset="-78"/>
                 <a:ea typeface="Amiri" pitchFamily="2" charset="-78"/>
                 <a:cs typeface="Amiri" pitchFamily="2" charset="-78"/>
               </a:rPr>
@@ -8728,7 +8728,7 @@
                 <a:solidFill>
                   <a:srgbClr val="FFFFFF"/>
                 </a:solidFill>
-                <a:latin typeface="Calibri" pitchFamily="34" charset="0"/>
+                <a:latin typeface="Amiri" pitchFamily="2" charset="-78"/>
                 <a:ea typeface="Amiri" pitchFamily="2" charset="-78"/>
                 <a:cs typeface="Amiri" pitchFamily="2" charset="-78"/>
               </a:rPr>
@@ -8794,7 +8794,7 @@
                 <a:solidFill>
                   <a:srgbClr val="FFFFFF"/>
                 </a:solidFill>
-                <a:latin typeface="Calibri" pitchFamily="34" charset="0"/>
+                <a:latin typeface="Amiri" pitchFamily="2" charset="-78"/>
                 <a:ea typeface="Amiri" pitchFamily="2" charset="-78"/>
                 <a:cs typeface="Amiri" pitchFamily="2" charset="-78"/>
               </a:rPr>
@@ -9581,7 +9581,7 @@
                 <a:solidFill>
                   <a:srgbClr val="FFFFFF"/>
                 </a:solidFill>
-                <a:latin typeface="Calibri" pitchFamily="34" charset="0"/>
+                <a:latin typeface="Amiri" pitchFamily="2" charset="-78"/>
                 <a:ea typeface="Amiri" pitchFamily="2" charset="-78"/>
                 <a:cs typeface="Amiri" pitchFamily="2" charset="-78"/>
               </a:rPr>
@@ -9647,7 +9647,7 @@
                 <a:solidFill>
                   <a:srgbClr val="FFFFFF"/>
                 </a:solidFill>
-                <a:latin typeface="Calibri" pitchFamily="34" charset="0"/>
+                <a:latin typeface="Amiri" pitchFamily="2" charset="-78"/>
                 <a:ea typeface="Amiri" pitchFamily="2" charset="-78"/>
                 <a:cs typeface="Amiri" pitchFamily="2" charset="-78"/>
               </a:rPr>
@@ -9713,7 +9713,7 @@
                 <a:solidFill>
                   <a:srgbClr val="FFFFFF"/>
                 </a:solidFill>
-                <a:latin typeface="Calibri" pitchFamily="34" charset="0"/>
+                <a:latin typeface="Amiri" pitchFamily="2" charset="-78"/>
                 <a:ea typeface="Amiri" pitchFamily="2" charset="-78"/>
                 <a:cs typeface="Amiri" pitchFamily="2" charset="-78"/>
               </a:rPr>
@@ -9779,7 +9779,7 @@
                 <a:solidFill>
                   <a:srgbClr val="FFFFFF"/>
                 </a:solidFill>
-                <a:latin typeface="Calibri" pitchFamily="34" charset="0"/>
+                <a:latin typeface="Amiri" pitchFamily="2" charset="-78"/>
                 <a:ea typeface="Amiri" pitchFamily="2" charset="-78"/>
                 <a:cs typeface="Amiri" pitchFamily="2" charset="-78"/>
               </a:rPr>
@@ -10566,7 +10566,7 @@
                 <a:solidFill>
                   <a:srgbClr val="FFFFFF"/>
                 </a:solidFill>
-                <a:latin typeface="Calibri" pitchFamily="34" charset="0"/>
+                <a:latin typeface="Amiri" pitchFamily="2" charset="-78"/>
                 <a:ea typeface="Amiri" pitchFamily="2" charset="-78"/>
                 <a:cs typeface="Amiri" pitchFamily="2" charset="-78"/>
               </a:rPr>
@@ -10632,7 +10632,7 @@
                 <a:solidFill>
                   <a:srgbClr val="FFFFFF"/>
                 </a:solidFill>
-                <a:latin typeface="Calibri" pitchFamily="34" charset="0"/>
+                <a:latin typeface="Amiri" pitchFamily="2" charset="-78"/>
                 <a:ea typeface="Amiri" pitchFamily="2" charset="-78"/>
                 <a:cs typeface="Amiri" pitchFamily="2" charset="-78"/>
               </a:rPr>
@@ -10698,7 +10698,7 @@
                 <a:solidFill>
                   <a:srgbClr val="FFFFFF"/>
                 </a:solidFill>
-                <a:latin typeface="Calibri" pitchFamily="34" charset="0"/>
+                <a:latin typeface="Amiri" pitchFamily="2" charset="-78"/>
                 <a:ea typeface="Amiri" pitchFamily="2" charset="-78"/>
                 <a:cs typeface="Amiri" pitchFamily="2" charset="-78"/>
               </a:rPr>
@@ -10764,7 +10764,7 @@
                 <a:solidFill>
                   <a:srgbClr val="FFFFFF"/>
                 </a:solidFill>
-                <a:latin typeface="Calibri" pitchFamily="34" charset="0"/>
+                <a:latin typeface="Amiri" pitchFamily="2" charset="-78"/>
                 <a:ea typeface="Amiri" pitchFamily="2" charset="-78"/>
                 <a:cs typeface="Amiri" pitchFamily="2" charset="-78"/>
               </a:rPr>
